--- a/public/fun/pack/pptx/talkpro/발표템플릿프리미엄_30_연말결산·회고_임페리얼퍼플.pptx
+++ b/public/fun/pack/pptx/talkpro/발표템플릿프리미엄_30_연말결산·회고_임페리얼퍼플.pptx
@@ -115,12 +115,12 @@
   <p:extLst>
     <p:ext uri="{521415D9-36F7-43E2-AB2F-B90AF26B5E84}">
       <p14:sectionLst xmlns:p14="http://schemas.microsoft.com/office/powerpoint/2010/main">
-        <p14:section name="시작" id="{483DED05-BD9F-4DDC-AA05-B05A0D17CD6A}">
+        <p14:section name="시작" id="{F19B12EF-4239-44C7-9245-00CB4A092D09}">
           <p14:sldIdLst>
             <p14:sldId id="256"/>
           </p14:sldIdLst>
         </p14:section>
-        <p14:section name="본문" id="{D443081F-1EA2-45F0-BE75-C188910523A2}">
+        <p14:section name="본문" id="{35082173-18EE-494B-BE08-B500326E858D}">
           <p14:sldIdLst>
             <p14:sldId id="257"/>
             <p14:sldId id="258"/>
@@ -131,7 +131,7 @@
             <p14:sldId id="263"/>
           </p14:sldIdLst>
         </p14:section>
-        <p14:section name="마무리" id="{84FB2841-9AFA-4070-8FBA-16C960BA0615}">
+        <p14:section name="마무리" id="{ADF035DC-8E4B-4520-901A-A589C7820098}">
           <p14:sldIdLst>
             <p14:sldId id="264"/>
           </p14:sldIdLst>
@@ -2025,7 +2025,7 @@
             </a:lvl1pPr>
           </a:lstStyle>
           <a:p>
-            <a:fld id="{5697BB07-A404-4CD2-A66E-9CDAACFD4491}" type="slidenum">
+            <a:fld id="{ADBEC065-D0FC-4D57-8610-023F78146976}" type="slidenum">
               <a:rPr lang="en-US"/>
               <a:t>‹#›</a:t>
             </a:fld>
@@ -2775,7 +2775,7 @@
             </a:lvl1pPr>
           </a:lstStyle>
           <a:p>
-            <a:fld id="{55C03D9F-BEFE-4383-99D1-31AF632AC554}" type="slidenum">
+            <a:fld id="{AF639D2F-9506-48F2-AFAE-9B06F7652CB0}" type="slidenum">
               <a:rPr lang="en-US"/>
               <a:t>‹#›</a:t>
             </a:fld>
@@ -3404,7 +3404,7 @@
             </a:lvl1pPr>
           </a:lstStyle>
           <a:p>
-            <a:fld id="{8241B19F-9DD2-45EA-88C1-C8C9E047312D}" type="slidenum">
+            <a:fld id="{7F42D0A2-CC54-4231-AEAC-45F64C20E279}" type="slidenum">
               <a:rPr lang="en-US"/>
               <a:t>‹#›</a:t>
             </a:fld>
@@ -4263,7 +4263,7 @@
           <a:p>
             <a:r>
               <a:rPr lang="ko-KR"/>
-              <a:t>0000. 00. 00</a:t>
+              <a:t>날짜 입력</a:t>
             </a:r>
           </a:p>
         </p:txBody>
@@ -4348,7 +4348,7 @@
           <a:bodyPr/>
           <a:lstStyle/>
           <a:p>
-            <a:fld id="{3FF5D152-BA95-4F35-9D99-EE664E64D20F}" type="slidenum">
+            <a:fld id="{22C0D073-C2AB-4C19-884A-2CBF36CFCDF2}" type="slidenum">
               <a:rPr lang="en-US"/>
               <a:t>‹#›</a:t>
             </a:fld>
@@ -5462,7 +5462,7 @@
           <a:bodyPr/>
           <a:lstStyle/>
           <a:p>
-            <a:fld id="{CC87C3ED-2899-4F3D-9B58-8F028C7B0266}" type="slidenum">
+            <a:fld id="{C94CA876-ECFD-44C1-A04D-CCBADA1ADA3D}" type="slidenum">
               <a:rPr lang="en-US"/>
               <a:t>‹#›</a:t>
             </a:fld>
@@ -5550,7 +5550,7 @@
           <a:bodyPr/>
           <a:lstStyle/>
           <a:p>
-            <a:fld id="{FEF970AB-1DFA-411A-8D9E-CBE428268717}" type="slidenum">
+            <a:fld id="{8C940145-41C4-4972-B801-9A6F62658181}" type="slidenum">
               <a:rPr lang="en-US"/>
               <a:t>‹#›</a:t>
             </a:fld>
@@ -6457,7 +6457,7 @@
           <a:bodyPr/>
           <a:lstStyle/>
           <a:p>
-            <a:fld id="{0F42B1A9-D027-4C59-BE5E-D7B7BE1FFD81}" type="slidenum">
+            <a:fld id="{D1E499E9-55BE-4FC7-80D5-F45D33F97F05}" type="slidenum">
               <a:rPr lang="en-US"/>
               <a:t>‹#›</a:t>
             </a:fld>
@@ -7061,7 +7061,7 @@
           <a:bodyPr/>
           <a:lstStyle/>
           <a:p>
-            <a:fld id="{B134C77A-502C-47A2-948B-D60A9FE4C249}" type="slidenum">
+            <a:fld id="{BDAFD81C-9518-4689-A4B7-2DC1DAE18BE7}" type="slidenum">
               <a:rPr lang="en-US"/>
               <a:t>‹#›</a:t>
             </a:fld>
@@ -7241,7 +7241,7 @@
           <a:bodyPr/>
           <a:lstStyle/>
           <a:p>
-            <a:fld id="{75923062-BD52-4184-B7C6-8753DB28F6AC}" type="slidenum">
+            <a:fld id="{F611CD22-F1A5-4182-8F58-6C19DDAF769C}" type="slidenum">
               <a:rPr lang="en-US"/>
               <a:t>‹#›</a:t>
             </a:fld>
@@ -8305,7 +8305,7 @@
           <a:bodyPr/>
           <a:lstStyle/>
           <a:p>
-            <a:fld id="{34EF431C-608E-4AD1-86E4-1083C043EF80}" type="slidenum">
+            <a:fld id="{FFE3D9E3-1C37-469E-AAED-845CF83AA2B2}" type="slidenum">
               <a:rPr lang="en-US"/>
               <a:t>‹#›</a:t>
             </a:fld>
